--- a/assets/pptx/catalog-297.pptx
+++ b/assets/pptx/catalog-297.pptx
@@ -3337,7 +3337,7 @@
                 <a:ea typeface="Ebrima"/>
                 <a:cs typeface="Ebrima"/>
               </a:rPr>
-              <a:t>ምኔን ብትወደው ነው (2x)</a:t>
+              <a:t>ምኔን ብትወደው ነው 2x</a:t>
             </a:r>
           </a:p>
           <a:p>
@@ -3422,7 +3422,7 @@
                 <a:ea typeface="Ebrima"/>
                 <a:cs typeface="Ebrima"/>
               </a:rPr>
-              <a:t>ምኔን ብትወደው ነው (2x)</a:t>
+              <a:t>ምኔን ብትወደው ነው 2x</a:t>
             </a:r>
           </a:p>
           <a:p>
@@ -3507,7 +3507,7 @@
                 <a:ea typeface="Ebrima"/>
                 <a:cs typeface="Ebrima"/>
               </a:rPr>
-              <a:t>ምኔን ብትወደው ነው (2x)</a:t>
+              <a:t>ምኔን ብትወደው ነው 2x</a:t>
             </a:r>
           </a:p>
           <a:p>
@@ -3713,7 +3713,7 @@
                 <a:ea typeface="Ebrima"/>
                 <a:cs typeface="Ebrima"/>
               </a:rPr>
-              <a:t>እራስህን ለኔ የሰጠኸው (2x)</a:t>
+              <a:t>እራስህን ለኔ የሰጠኸው 2x</a:t>
             </a:r>
           </a:p>
         </p:txBody>
@@ -3780,7 +3780,7 @@
                 <a:ea typeface="Ebrima"/>
                 <a:cs typeface="Ebrima"/>
               </a:rPr>
-              <a:t>ምኔን ብትወደው ነው (2x)</a:t>
+              <a:t>ምኔን ብትወደው ነው 2x</a:t>
             </a:r>
           </a:p>
           <a:p>
@@ -3865,7 +3865,7 @@
                 <a:ea typeface="Ebrima"/>
                 <a:cs typeface="Ebrima"/>
               </a:rPr>
-              <a:t>ምኔን ብትወደው ነው (2x)</a:t>
+              <a:t>ምኔን ብትወደው ነው 2x</a:t>
             </a:r>
           </a:p>
           <a:p>
@@ -4089,7 +4089,7 @@
                 <a:ea typeface="Ebrima"/>
                 <a:cs typeface="Ebrima"/>
               </a:rPr>
-              <a:t>እራስህን ለኔ የሰጠኸው (2x)</a:t>
+              <a:t>እራስህን ለኔ የሰጠኸው 2x</a:t>
             </a:r>
           </a:p>
         </p:txBody>
@@ -4156,7 +4156,7 @@
                 <a:ea typeface="Ebrima"/>
                 <a:cs typeface="Ebrima"/>
               </a:rPr>
-              <a:t>ምኔን ብትወደው ነው (2x)</a:t>
+              <a:t>ምኔን ብትወደው ነው 2x</a:t>
             </a:r>
           </a:p>
           <a:p>
@@ -4241,7 +4241,7 @@
                 <a:ea typeface="Ebrima"/>
                 <a:cs typeface="Ebrima"/>
               </a:rPr>
-              <a:t>ምኔን ብትወደው ነው (2x)</a:t>
+              <a:t>ምኔን ብትወደው ነው 2x</a:t>
             </a:r>
           </a:p>
           <a:p>
